--- a/dist/초3/음악·미술/음악표현/초3_음악·미술_음악표현_01_박과리듬.pptx
+++ b/dist/초3/음악·미술/음악표현/초3_음악·미술_음악표현_01_박과리듬.pptx
@@ -114,30 +114,30 @@
   <p:extLst>
     <p:ext uri="{521415D9-36F7-43E2-AB2F-B90AF26B5E84}">
       <p14:sectionLst xmlns:p14="http://schemas.microsoft.com/office/powerpoint/2010/main">
-        <p14:section name="도입" id="{8ff7f6d5-eea0-ed8e-1960-5f13b48fa572}">
+        <p14:section name="도입" id="{2b827055-ae2d-e830-3afd-343d706d7acd}">
           <p14:sldIdLst>
             <p14:sldId id="256"/>
           </p14:sldIdLst>
         </p14:section>
-        <p14:section name="개념" id="{1b9f1a43-9dc4-e4db-99cd-5af95f157672}">
+        <p14:section name="개념" id="{bb193c9f-e6a9-5e0e-9efa-96e7893255f0}">
           <p14:sldIdLst>
             <p14:sldId id="257"/>
             <p14:sldId id="258"/>
             <p14:sldId id="259"/>
           </p14:sldIdLst>
         </p14:section>
-        <p14:section name="연습" id="{3e6e742a-19c6-a12e-14b9-7db4384ed289}">
+        <p14:section name="연습" id="{dfb2c9a5-6a1e-3a32-90f2-125c049ae7ab}">
           <p14:sldIdLst>
             <p14:sldId id="260"/>
             <p14:sldId id="261"/>
           </p14:sldIdLst>
         </p14:section>
-        <p14:section name="확인" id="{5ef38b0f-8032-9ba8-186a-be4580c3d9e3}">
+        <p14:section name="확인" id="{06590ff9-898e-e518-a013-9159cc1baf5d}">
           <p14:sldIdLst>
             <p14:sldId id="262"/>
           </p14:sldIdLst>
         </p14:section>
-        <p14:section name="정리" id="{71c9d4f4-afca-9520-dd58-65ade79e4c86}">
+        <p14:section name="정리" id="{82e9b50d-97c9-1914-f0b8-39d98b668b97}">
           <p14:sldIdLst>
             <p14:sldId id="263"/>
           </p14:sldIdLst>
@@ -2317,7 +2317,7 @@
           <a:bodyPr wrap="square" lIns="0" tIns="0" rIns="0" bIns="0" rtlCol="0" anchor="ctr"/>
           <a:lstStyle/>
           <a:p>
-            <a:pPr algn="l" indent="0" marL="0">
+            <a:pPr eaLnBrk="0" algn="l" indent="0" marL="0">
               <a:buNone/>
             </a:pPr>
             <a:r>
@@ -2358,7 +2358,7 @@
           <a:bodyPr wrap="square" lIns="0" tIns="0" rIns="0" bIns="0" rtlCol="0" anchor="t"/>
           <a:lstStyle/>
           <a:p>
-            <a:pPr indent="0" marL="0">
+            <a:pPr eaLnBrk="0" indent="0" marL="0">
               <a:buNone/>
             </a:pPr>
             <a:r>
@@ -2410,7 +2410,7 @@
                     <a:bodyPr/>
                     <a:lstStyle/>
                     <a:p>
-                      <a:pPr algn="ctr" indent="0" marL="0">
+                      <a:pPr eaLnBrk="0" algn="ctr" indent="0" marL="0">
                         <a:buNone/>
                       </a:pPr>
                       <a:r>
@@ -2478,7 +2478,7 @@
                     <a:bodyPr/>
                     <a:lstStyle/>
                     <a:p>
-                      <a:pPr algn="ctr" indent="0" marL="0">
+                      <a:pPr eaLnBrk="0" algn="ctr" indent="0" marL="0">
                         <a:buNone/>
                       </a:pPr>
                       <a:r>
@@ -2546,7 +2546,7 @@
                     <a:bodyPr/>
                     <a:lstStyle/>
                     <a:p>
-                      <a:pPr algn="ctr" indent="0" marL="0">
+                      <a:pPr eaLnBrk="0" algn="ctr" indent="0" marL="0">
                         <a:buNone/>
                       </a:pPr>
                       <a:r>
@@ -2614,7 +2614,7 @@
                     <a:bodyPr/>
                     <a:lstStyle/>
                     <a:p>
-                      <a:pPr algn="ctr" indent="0" marL="0">
+                      <a:pPr eaLnBrk="0" algn="ctr" indent="0" marL="0">
                         <a:buNone/>
                       </a:pPr>
                       <a:r>
@@ -2684,7 +2684,7 @@
                     <a:bodyPr/>
                     <a:lstStyle/>
                     <a:p>
-                      <a:pPr algn="ctr" indent="0" marL="0">
+                      <a:pPr eaLnBrk="0" algn="ctr" indent="0" marL="0">
                         <a:buNone/>
                       </a:pPr>
                       <a:r>
@@ -2752,7 +2752,7 @@
                     <a:bodyPr/>
                     <a:lstStyle/>
                     <a:p>
-                      <a:pPr algn="ctr" indent="0" marL="0">
+                      <a:pPr eaLnBrk="0" algn="ctr" indent="0" marL="0">
                         <a:buNone/>
                       </a:pPr>
                       <a:r>
@@ -2820,7 +2820,7 @@
                     <a:bodyPr/>
                     <a:lstStyle/>
                     <a:p>
-                      <a:pPr algn="ctr" indent="0" marL="0">
+                      <a:pPr eaLnBrk="0" algn="ctr" indent="0" marL="0">
                         <a:buNone/>
                       </a:pPr>
                       <a:r>
@@ -2888,7 +2888,7 @@
                     <a:bodyPr/>
                     <a:lstStyle/>
                     <a:p>
-                      <a:pPr algn="ctr" indent="0" marL="0">
+                      <a:pPr eaLnBrk="0" algn="ctr" indent="0" marL="0">
                         <a:buNone/>
                       </a:pPr>
                       <a:r>
@@ -3004,7 +3004,7 @@
           <a:bodyPr wrap="square" lIns="0" tIns="0" rIns="0" bIns="0" rtlCol="0" anchor="ctr"/>
           <a:lstStyle/>
           <a:p>
-            <a:pPr indent="0" marL="0">
+            <a:pPr eaLnBrk="0" indent="0" marL="0">
               <a:spcAft>
                 <a:spcPts val="600"/>
               </a:spcAft>
@@ -3024,7 +3024,7 @@
             <a:endParaRPr lang="ko-KR" sz="3000" dirty="0"/>
           </a:p>
           <a:p>
-            <a:pPr indent="0" marL="0">
+            <a:pPr eaLnBrk="0" indent="0" marL="0">
               <a:spcAft>
                 <a:spcPts val="600"/>
               </a:spcAft>
@@ -3044,7 +3044,7 @@
             <a:endParaRPr lang="ko-KR" sz="3000" dirty="0"/>
           </a:p>
           <a:p>
-            <a:pPr indent="0" marL="0">
+            <a:pPr eaLnBrk="0" indent="0" marL="0">
               <a:spcAft>
                 <a:spcPts val="600"/>
               </a:spcAft>
@@ -3113,7 +3113,7 @@
           <a:bodyPr wrap="square" lIns="0" tIns="0" rIns="0" bIns="0" rtlCol="0" anchor="ctr"/>
           <a:lstStyle/>
           <a:p>
-            <a:pPr algn="l" indent="0" marL="0">
+            <a:pPr eaLnBrk="0" algn="l" indent="0" marL="0">
               <a:buNone/>
             </a:pPr>
             <a:r>
@@ -3179,7 +3179,7 @@
           <a:bodyPr wrap="square" lIns="0" tIns="0" rIns="0" bIns="0" rtlCol="0" anchor="ctr"/>
           <a:lstStyle/>
           <a:p>
-            <a:pPr indent="0" marL="0">
+            <a:pPr eaLnBrk="0" indent="0" marL="0">
               <a:spcAft>
                 <a:spcPts val="600"/>
               </a:spcAft>
@@ -3248,7 +3248,7 @@
           <a:bodyPr wrap="square" lIns="0" tIns="0" rIns="0" bIns="0" rtlCol="0" anchor="ctr"/>
           <a:lstStyle/>
           <a:p>
-            <a:pPr indent="0" marL="0">
+            <a:pPr eaLnBrk="0" indent="0" marL="0">
               <a:spcAft>
                 <a:spcPts val="600"/>
               </a:spcAft>
@@ -3268,7 +3268,7 @@
             <a:endParaRPr lang="ko-KR" sz="3000" dirty="0"/>
           </a:p>
           <a:p>
-            <a:pPr indent="0" marL="0">
+            <a:pPr eaLnBrk="0" indent="0" marL="0">
               <a:spcAft>
                 <a:spcPts val="600"/>
               </a:spcAft>
@@ -3337,7 +3337,7 @@
           <a:bodyPr wrap="square" lIns="0" tIns="0" rIns="0" bIns="0" rtlCol="0" anchor="ctr"/>
           <a:lstStyle/>
           <a:p>
-            <a:pPr indent="0" marL="0">
+            <a:pPr eaLnBrk="0" indent="0" marL="0">
               <a:spcAft>
                 <a:spcPts val="600"/>
               </a:spcAft>
@@ -3357,7 +3357,7 @@
             <a:endParaRPr lang="ko-KR" sz="3000" dirty="0"/>
           </a:p>
           <a:p>
-            <a:pPr indent="0" marL="0">
+            <a:pPr eaLnBrk="0" indent="0" marL="0">
               <a:spcAft>
                 <a:spcPts val="600"/>
               </a:spcAft>
@@ -3417,7 +3417,7 @@
             </a:lvl1pPr>
           </a:lstStyle>
           <a:p>
-            <a:pPr algn="r"/>
+            <a:pPr eaLnBrk="0" algn="r"/>
             <a:fld id="{F7021451-1387-4CA6-816F-3879F97B5CBC}" type="slidenum">
               <a:rPr b="0" lang="en-US"/>
               <a:t>2</a:t>
@@ -3474,7 +3474,7 @@
           <a:bodyPr wrap="square" lIns="0" tIns="0" rIns="0" bIns="0" rtlCol="0" anchor="ctr"/>
           <a:lstStyle/>
           <a:p>
-            <a:pPr algn="l" indent="0" marL="0">
+            <a:pPr eaLnBrk="0" algn="l" indent="0" marL="0">
               <a:buNone/>
             </a:pPr>
             <a:r>
@@ -3513,7 +3513,7 @@
           <a:bodyPr wrap="square" lIns="0" tIns="0" rIns="0" bIns="0" rtlCol="0" anchor="ctr"/>
           <a:lstStyle/>
           <a:p>
-            <a:pPr algn="l" indent="0" marL="0">
+            <a:pPr eaLnBrk="0" algn="l" indent="0" marL="0">
               <a:buNone/>
             </a:pPr>
             <a:r>
@@ -3579,7 +3579,7 @@
           <a:bodyPr wrap="square" lIns="0" tIns="0" rIns="0" bIns="0" rtlCol="0" anchor="ctr"/>
           <a:lstStyle/>
           <a:p>
-            <a:pPr indent="0" marL="0">
+            <a:pPr eaLnBrk="0" indent="0" marL="0">
               <a:spcAft>
                 <a:spcPts val="600"/>
               </a:spcAft>
@@ -3599,7 +3599,7 @@
             <a:endParaRPr lang="ko-KR" sz="3000" dirty="0"/>
           </a:p>
           <a:p>
-            <a:pPr indent="0" marL="0">
+            <a:pPr eaLnBrk="0" indent="0" marL="0">
               <a:spcAft>
                 <a:spcPts val="600"/>
               </a:spcAft>
@@ -3619,7 +3619,7 @@
             <a:endParaRPr lang="ko-KR" sz="3000" dirty="0"/>
           </a:p>
           <a:p>
-            <a:pPr indent="0" marL="0">
+            <a:pPr eaLnBrk="0" indent="0" marL="0">
               <a:spcAft>
                 <a:spcPts val="600"/>
               </a:spcAft>
@@ -3667,7 +3667,7 @@
           <a:bodyPr wrap="square" lIns="0" tIns="0" rIns="0" bIns="0" rtlCol="0" anchor="ctr"/>
           <a:lstStyle/>
           <a:p>
-            <a:pPr algn="ctr" indent="0" marL="0">
+            <a:pPr eaLnBrk="0" algn="ctr" indent="0" marL="0">
               <a:buNone/>
             </a:pPr>
             <a:r>
@@ -3706,7 +3706,7 @@
           <a:bodyPr wrap="square" lIns="0" tIns="0" rIns="0" bIns="0" rtlCol="0" anchor="t"/>
           <a:lstStyle/>
           <a:p>
-            <a:pPr algn="l" indent="0" marL="0">
+            <a:pPr eaLnBrk="0" algn="l" indent="0" marL="0">
               <a:buNone/>
             </a:pPr>
             <a:r>
@@ -3751,7 +3751,7 @@
           <a:bodyPr wrap="square" lIns="0" tIns="0" rIns="0" bIns="0" rtlCol="0" anchor="ctr"/>
           <a:lstStyle/>
           <a:p>
-            <a:pPr algn="ctr" indent="0" marL="0">
+            <a:pPr eaLnBrk="0" algn="ctr" indent="0" marL="0">
               <a:buNone/>
             </a:pPr>
             <a:r>
@@ -3790,7 +3790,7 @@
           <a:bodyPr wrap="square" lIns="0" tIns="0" rIns="0" bIns="0" rtlCol="0" anchor="t"/>
           <a:lstStyle/>
           <a:p>
-            <a:pPr algn="l" indent="0" marL="0">
+            <a:pPr eaLnBrk="0" algn="l" indent="0" marL="0">
               <a:buNone/>
             </a:pPr>
             <a:r>
@@ -3835,7 +3835,7 @@
           <a:bodyPr wrap="square" lIns="0" tIns="0" rIns="0" bIns="0" rtlCol="0" anchor="ctr"/>
           <a:lstStyle/>
           <a:p>
-            <a:pPr algn="ctr" indent="0" marL="0">
+            <a:pPr eaLnBrk="0" algn="ctr" indent="0" marL="0">
               <a:buNone/>
             </a:pPr>
             <a:r>
@@ -3874,7 +3874,7 @@
           <a:bodyPr wrap="square" lIns="0" tIns="0" rIns="0" bIns="0" rtlCol="0" anchor="t"/>
           <a:lstStyle/>
           <a:p>
-            <a:pPr algn="l" indent="0" marL="0">
+            <a:pPr eaLnBrk="0" algn="l" indent="0" marL="0">
               <a:buNone/>
             </a:pPr>
             <a:r>
@@ -3931,7 +3931,7 @@
             </a:lvl1pPr>
           </a:lstStyle>
           <a:p>
-            <a:pPr algn="r"/>
+            <a:pPr eaLnBrk="0" algn="r"/>
             <a:fld id="{F7021451-1387-4CA6-816F-3879F97B5CBC}" type="slidenum">
               <a:rPr b="0" lang="en-US"/>
               <a:t>3</a:t>
@@ -3988,7 +3988,7 @@
           <a:bodyPr wrap="square" lIns="0" tIns="0" rIns="0" bIns="0" rtlCol="0" anchor="ctr"/>
           <a:lstStyle/>
           <a:p>
-            <a:pPr algn="l" indent="0" marL="0">
+            <a:pPr eaLnBrk="0" algn="l" indent="0" marL="0">
               <a:buNone/>
             </a:pPr>
             <a:r>
@@ -4027,7 +4027,7 @@
           <a:bodyPr wrap="square" lIns="0" tIns="0" rIns="0" bIns="0" rtlCol="0" anchor="ctr"/>
           <a:lstStyle/>
           <a:p>
-            <a:pPr algn="l" indent="0" marL="0">
+            <a:pPr eaLnBrk="0" algn="l" indent="0" marL="0">
               <a:buNone/>
             </a:pPr>
             <a:r>
@@ -4093,7 +4093,7 @@
           <a:bodyPr wrap="square" lIns="0" tIns="0" rIns="0" bIns="0" rtlCol="0" anchor="ctr"/>
           <a:lstStyle/>
           <a:p>
-            <a:pPr indent="0" marL="0">
+            <a:pPr eaLnBrk="0" indent="0" marL="0">
               <a:spcAft>
                 <a:spcPts val="600"/>
               </a:spcAft>
@@ -4148,7 +4148,7 @@
                     <a:bodyPr/>
                     <a:lstStyle/>
                     <a:p>
-                      <a:pPr algn="ctr" indent="0" marL="0">
+                      <a:pPr eaLnBrk="0" algn="ctr" indent="0" marL="0">
                         <a:buNone/>
                       </a:pPr>
                       <a:r>
@@ -4216,7 +4216,7 @@
                     <a:bodyPr/>
                     <a:lstStyle/>
                     <a:p>
-                      <a:pPr algn="ctr" indent="0" marL="0">
+                      <a:pPr eaLnBrk="0" algn="ctr" indent="0" marL="0">
                         <a:buNone/>
                       </a:pPr>
                       <a:r>
@@ -4284,7 +4284,7 @@
                     <a:bodyPr/>
                     <a:lstStyle/>
                     <a:p>
-                      <a:pPr algn="ctr" indent="0" marL="0">
+                      <a:pPr eaLnBrk="0" algn="ctr" indent="0" marL="0">
                         <a:buNone/>
                       </a:pPr>
                       <a:r>
@@ -4352,7 +4352,7 @@
                     <a:bodyPr/>
                     <a:lstStyle/>
                     <a:p>
-                      <a:pPr algn="ctr" indent="0" marL="0">
+                      <a:pPr eaLnBrk="0" algn="ctr" indent="0" marL="0">
                         <a:buNone/>
                       </a:pPr>
                       <a:r>
@@ -4422,7 +4422,7 @@
                     <a:bodyPr/>
                     <a:lstStyle/>
                     <a:p>
-                      <a:pPr algn="ctr" indent="0" marL="0">
+                      <a:pPr eaLnBrk="0" algn="ctr" indent="0" marL="0">
                         <a:buNone/>
                       </a:pPr>
                       <a:r>
@@ -4490,7 +4490,7 @@
                     <a:bodyPr/>
                     <a:lstStyle/>
                     <a:p>
-                      <a:pPr algn="ctr" indent="0" marL="0">
+                      <a:pPr eaLnBrk="0" algn="ctr" indent="0" marL="0">
                         <a:buNone/>
                       </a:pPr>
                       <a:r>
@@ -4558,7 +4558,7 @@
                     <a:bodyPr/>
                     <a:lstStyle/>
                     <a:p>
-                      <a:pPr algn="ctr" indent="0" marL="0">
+                      <a:pPr eaLnBrk="0" algn="ctr" indent="0" marL="0">
                         <a:buNone/>
                       </a:pPr>
                       <a:r>
@@ -4626,7 +4626,7 @@
                     <a:bodyPr/>
                     <a:lstStyle/>
                     <a:p>
-                      <a:pPr algn="ctr" indent="0" marL="0">
+                      <a:pPr eaLnBrk="0" algn="ctr" indent="0" marL="0">
                         <a:buNone/>
                       </a:pPr>
                       <a:r>
@@ -4733,7 +4733,7 @@
             </a:lvl1pPr>
           </a:lstStyle>
           <a:p>
-            <a:pPr algn="r"/>
+            <a:pPr eaLnBrk="0" algn="r"/>
             <a:fld id="{F7021451-1387-4CA6-816F-3879F97B5CBC}" type="slidenum">
               <a:rPr b="0" lang="en-US"/>
               <a:t>4</a:t>
@@ -4790,7 +4790,7 @@
           <a:bodyPr wrap="square" lIns="0" tIns="0" rIns="0" bIns="0" rtlCol="0" anchor="ctr"/>
           <a:lstStyle/>
           <a:p>
-            <a:pPr algn="l" indent="0" marL="0">
+            <a:pPr eaLnBrk="0" algn="l" indent="0" marL="0">
               <a:buNone/>
             </a:pPr>
             <a:r>
@@ -4829,7 +4829,7 @@
           <a:bodyPr wrap="square" lIns="0" tIns="0" rIns="0" bIns="0" rtlCol="0" anchor="ctr"/>
           <a:lstStyle/>
           <a:p>
-            <a:pPr algn="l" indent="0" marL="0">
+            <a:pPr eaLnBrk="0" algn="l" indent="0" marL="0">
               <a:buNone/>
             </a:pPr>
             <a:r>
@@ -4895,7 +4895,7 @@
           <a:bodyPr wrap="square" lIns="0" tIns="0" rIns="0" bIns="0" rtlCol="0" anchor="ctr"/>
           <a:lstStyle/>
           <a:p>
-            <a:pPr indent="0" marL="0">
+            <a:pPr eaLnBrk="0" indent="0" marL="0">
               <a:spcAft>
                 <a:spcPts val="600"/>
               </a:spcAft>
@@ -4945,7 +4945,7 @@
           <a:bodyPr wrap="square" lIns="0" tIns="0" rIns="0" bIns="0" rtlCol="0" anchor="ctr"/>
           <a:lstStyle/>
           <a:p>
-            <a:pPr algn="ctr" indent="0" marL="0">
+            <a:pPr eaLnBrk="0" algn="ctr" indent="0" marL="0">
               <a:buNone/>
             </a:pPr>
             <a:r>
@@ -4997,7 +4997,7 @@
                     <a:bodyPr/>
                     <a:lstStyle/>
                     <a:p>
-                      <a:pPr algn="ctr" indent="0" marL="0">
+                      <a:pPr eaLnBrk="0" algn="ctr" indent="0" marL="0">
                         <a:buNone/>
                       </a:pPr>
                       <a:r>
@@ -5065,7 +5065,7 @@
                     <a:bodyPr/>
                     <a:lstStyle/>
                     <a:p>
-                      <a:pPr algn="ctr" indent="0" marL="0">
+                      <a:pPr eaLnBrk="0" algn="ctr" indent="0" marL="0">
                         <a:buNone/>
                       </a:pPr>
                       <a:r>
@@ -5133,7 +5133,7 @@
                     <a:bodyPr/>
                     <a:lstStyle/>
                     <a:p>
-                      <a:pPr algn="ctr" indent="0" marL="0">
+                      <a:pPr eaLnBrk="0" algn="ctr" indent="0" marL="0">
                         <a:buNone/>
                       </a:pPr>
                       <a:r>
@@ -5201,7 +5201,7 @@
                     <a:bodyPr/>
                     <a:lstStyle/>
                     <a:p>
-                      <a:pPr algn="ctr" indent="0" marL="0">
+                      <a:pPr eaLnBrk="0" algn="ctr" indent="0" marL="0">
                         <a:buNone/>
                       </a:pPr>
                       <a:r>
@@ -5298,7 +5298,7 @@
           <a:bodyPr wrap="square" lIns="0" tIns="0" rIns="0" bIns="0" rtlCol="0" anchor="ctr"/>
           <a:lstStyle/>
           <a:p>
-            <a:pPr algn="ctr" indent="0" marL="0">
+            <a:pPr eaLnBrk="0" algn="ctr" indent="0" marL="0">
               <a:buNone/>
             </a:pPr>
             <a:r>
@@ -5350,7 +5350,7 @@
                     <a:bodyPr/>
                     <a:lstStyle/>
                     <a:p>
-                      <a:pPr algn="ctr" indent="0" marL="0">
+                      <a:pPr eaLnBrk="0" algn="ctr" indent="0" marL="0">
                         <a:buNone/>
                       </a:pPr>
                       <a:r>
@@ -5418,7 +5418,7 @@
                     <a:bodyPr/>
                     <a:lstStyle/>
                     <a:p>
-                      <a:pPr algn="ctr" indent="0" marL="0">
+                      <a:pPr eaLnBrk="0" algn="ctr" indent="0" marL="0">
                         <a:buNone/>
                       </a:pPr>
                       <a:r>
@@ -5486,7 +5486,7 @@
                     <a:bodyPr/>
                     <a:lstStyle/>
                     <a:p>
-                      <a:pPr algn="ctr" indent="0" marL="0">
+                      <a:pPr eaLnBrk="0" algn="ctr" indent="0" marL="0">
                         <a:buNone/>
                       </a:pPr>
                       <a:r>
@@ -5554,7 +5554,7 @@
                     <a:bodyPr/>
                     <a:lstStyle/>
                     <a:p>
-                      <a:pPr algn="ctr" indent="0" marL="0">
+                      <a:pPr eaLnBrk="0" algn="ctr" indent="0" marL="0">
                         <a:buNone/>
                       </a:pPr>
                       <a:r>
@@ -5651,7 +5651,7 @@
           <a:bodyPr wrap="square" lIns="0" tIns="0" rIns="0" bIns="0" rtlCol="0" anchor="ctr"/>
           <a:lstStyle/>
           <a:p>
-            <a:pPr algn="ctr" indent="0" marL="0">
+            <a:pPr eaLnBrk="0" algn="ctr" indent="0" marL="0">
               <a:buNone/>
             </a:pPr>
             <a:r>
@@ -5703,7 +5703,7 @@
                     <a:bodyPr/>
                     <a:lstStyle/>
                     <a:p>
-                      <a:pPr algn="ctr" indent="0" marL="0">
+                      <a:pPr eaLnBrk="0" algn="ctr" indent="0" marL="0">
                         <a:buNone/>
                       </a:pPr>
                       <a:r>
@@ -5771,7 +5771,7 @@
                     <a:bodyPr/>
                     <a:lstStyle/>
                     <a:p>
-                      <a:pPr algn="ctr" indent="0" marL="0">
+                      <a:pPr eaLnBrk="0" algn="ctr" indent="0" marL="0">
                         <a:buNone/>
                       </a:pPr>
                       <a:r>
@@ -5839,7 +5839,7 @@
                     <a:bodyPr/>
                     <a:lstStyle/>
                     <a:p>
-                      <a:pPr algn="ctr" indent="0" marL="0">
+                      <a:pPr eaLnBrk="0" algn="ctr" indent="0" marL="0">
                         <a:buNone/>
                       </a:pPr>
                       <a:r>
@@ -5907,7 +5907,7 @@
                     <a:bodyPr/>
                     <a:lstStyle/>
                     <a:p>
-                      <a:pPr algn="ctr" indent="0" marL="0">
+                      <a:pPr eaLnBrk="0" algn="ctr" indent="0" marL="0">
                         <a:buNone/>
                       </a:pPr>
                       <a:r>
@@ -6014,7 +6014,7 @@
             </a:lvl1pPr>
           </a:lstStyle>
           <a:p>
-            <a:pPr algn="r"/>
+            <a:pPr eaLnBrk="0" algn="r"/>
             <a:fld id="{F7021451-1387-4CA6-816F-3879F97B5CBC}" type="slidenum">
               <a:rPr b="0" lang="en-US"/>
               <a:t>5</a:t>
@@ -6071,7 +6071,7 @@
           <a:bodyPr wrap="square" lIns="0" tIns="0" rIns="0" bIns="0" rtlCol="0" anchor="ctr"/>
           <a:lstStyle/>
           <a:p>
-            <a:pPr algn="l" indent="0" marL="0">
+            <a:pPr eaLnBrk="0" algn="l" indent="0" marL="0">
               <a:buNone/>
             </a:pPr>
             <a:r>
@@ -6137,7 +6137,7 @@
           <a:bodyPr wrap="square" lIns="0" tIns="0" rIns="0" bIns="0" rtlCol="0" anchor="ctr"/>
           <a:lstStyle/>
           <a:p>
-            <a:pPr indent="0" marL="0">
+            <a:pPr eaLnBrk="0" indent="0" marL="0">
               <a:spcAft>
                 <a:spcPts val="600"/>
               </a:spcAft>
@@ -6206,7 +6206,7 @@
           <a:bodyPr wrap="square" lIns="0" tIns="0" rIns="0" bIns="0" rtlCol="0" anchor="ctr"/>
           <a:lstStyle/>
           <a:p>
-            <a:pPr indent="0" marL="0">
+            <a:pPr eaLnBrk="0" indent="0" marL="0">
               <a:spcAft>
                 <a:spcPts val="600"/>
               </a:spcAft>
@@ -6256,7 +6256,7 @@
           <a:bodyPr wrap="square" lIns="177800" tIns="0" rIns="177800" bIns="0" rtlCol="0" anchor="ctr"/>
           <a:lstStyle/>
           <a:p>
-            <a:pPr algn="l" indent="0" marL="0">
+            <a:pPr eaLnBrk="0" algn="l" indent="0" marL="0">
               <a:buNone/>
             </a:pPr>
             <a:r>
@@ -6295,7 +6295,7 @@
           <a:bodyPr wrap="square" lIns="0" tIns="0" rIns="0" bIns="0" rtlCol="0" anchor="t"/>
           <a:lstStyle/>
           <a:p>
-            <a:pPr algn="l" indent="0" marL="0">
+            <a:pPr eaLnBrk="0" algn="l" indent="0" marL="0">
               <a:buNone/>
             </a:pPr>
             <a:r>
@@ -6342,7 +6342,7 @@
           <a:bodyPr wrap="square" lIns="177800" tIns="0" rIns="177800" bIns="0" rtlCol="0" anchor="ctr"/>
           <a:lstStyle/>
           <a:p>
-            <a:pPr algn="l" indent="0" marL="0">
+            <a:pPr eaLnBrk="0" algn="l" indent="0" marL="0">
               <a:buNone/>
             </a:pPr>
             <a:r>
@@ -6381,7 +6381,7 @@
           <a:bodyPr wrap="square" lIns="0" tIns="0" rIns="0" bIns="0" rtlCol="0" anchor="t"/>
           <a:lstStyle/>
           <a:p>
-            <a:pPr algn="l" indent="0" marL="0">
+            <a:pPr eaLnBrk="0" algn="l" indent="0" marL="0">
               <a:buNone/>
             </a:pPr>
             <a:r>
@@ -6438,7 +6438,7 @@
             </a:lvl1pPr>
           </a:lstStyle>
           <a:p>
-            <a:pPr algn="r"/>
+            <a:pPr eaLnBrk="0" algn="r"/>
             <a:fld id="{F7021451-1387-4CA6-816F-3879F97B5CBC}" type="slidenum">
               <a:rPr b="0" lang="en-US"/>
               <a:t>6</a:t>
@@ -6495,7 +6495,7 @@
           <a:bodyPr wrap="square" lIns="0" tIns="0" rIns="0" bIns="0" rtlCol="0" anchor="ctr"/>
           <a:lstStyle/>
           <a:p>
-            <a:pPr algn="l" indent="0" marL="0">
+            <a:pPr eaLnBrk="0" algn="l" indent="0" marL="0">
               <a:buNone/>
             </a:pPr>
             <a:r>
@@ -6534,7 +6534,7 @@
           <a:bodyPr wrap="square" lIns="0" tIns="0" rIns="0" bIns="0" rtlCol="0" anchor="ctr"/>
           <a:lstStyle/>
           <a:p>
-            <a:pPr algn="l" indent="0" marL="0">
+            <a:pPr eaLnBrk="0" algn="l" indent="0" marL="0">
               <a:buNone/>
             </a:pPr>
             <a:r>
@@ -6600,7 +6600,7 @@
           <a:bodyPr wrap="square" lIns="0" tIns="0" rIns="0" bIns="0" rtlCol="0" anchor="ctr"/>
           <a:lstStyle/>
           <a:p>
-            <a:pPr indent="0" marL="0">
+            <a:pPr eaLnBrk="0" indent="0" marL="0">
               <a:spcAft>
                 <a:spcPts val="600"/>
               </a:spcAft>
@@ -6620,7 +6620,7 @@
             <a:endParaRPr lang="ko-KR" sz="3000" dirty="0"/>
           </a:p>
           <a:p>
-            <a:pPr indent="0" marL="0">
+            <a:pPr eaLnBrk="0" indent="0" marL="0">
               <a:spcAft>
                 <a:spcPts val="600"/>
               </a:spcAft>
@@ -6640,7 +6640,7 @@
             <a:endParaRPr lang="ko-KR" sz="3000" dirty="0"/>
           </a:p>
           <a:p>
-            <a:pPr indent="0" marL="0">
+            <a:pPr eaLnBrk="0" indent="0" marL="0">
               <a:spcAft>
                 <a:spcPts val="600"/>
               </a:spcAft>
@@ -6660,7 +6660,7 @@
             <a:endParaRPr lang="ko-KR" sz="3000" dirty="0"/>
           </a:p>
           <a:p>
-            <a:pPr indent="0" marL="0">
+            <a:pPr eaLnBrk="0" indent="0" marL="0">
               <a:spcAft>
                 <a:spcPts val="600"/>
               </a:spcAft>
@@ -6708,7 +6708,7 @@
           <a:bodyPr wrap="square" lIns="0" tIns="0" rIns="0" bIns="0" rtlCol="0" anchor="ctr"/>
           <a:lstStyle/>
           <a:p>
-            <a:pPr algn="ctr" indent="0" marL="0">
+            <a:pPr eaLnBrk="0" algn="ctr" indent="0" marL="0">
               <a:buNone/>
             </a:pPr>
             <a:r>
@@ -6747,7 +6747,7 @@
           <a:bodyPr wrap="square" lIns="0" tIns="0" rIns="0" bIns="0" rtlCol="0" anchor="t"/>
           <a:lstStyle/>
           <a:p>
-            <a:pPr algn="l" indent="0" marL="0">
+            <a:pPr eaLnBrk="0" algn="l" indent="0" marL="0">
               <a:buNone/>
             </a:pPr>
             <a:r>
@@ -6792,7 +6792,7 @@
           <a:bodyPr wrap="square" lIns="0" tIns="0" rIns="0" bIns="0" rtlCol="0" anchor="ctr"/>
           <a:lstStyle/>
           <a:p>
-            <a:pPr algn="ctr" indent="0" marL="0">
+            <a:pPr eaLnBrk="0" algn="ctr" indent="0" marL="0">
               <a:buNone/>
             </a:pPr>
             <a:r>
@@ -6831,7 +6831,7 @@
           <a:bodyPr wrap="square" lIns="0" tIns="0" rIns="0" bIns="0" rtlCol="0" anchor="t"/>
           <a:lstStyle/>
           <a:p>
-            <a:pPr algn="l" indent="0" marL="0">
+            <a:pPr eaLnBrk="0" algn="l" indent="0" marL="0">
               <a:buNone/>
             </a:pPr>
             <a:r>
@@ -6876,7 +6876,7 @@
           <a:bodyPr wrap="square" lIns="0" tIns="0" rIns="0" bIns="0" rtlCol="0" anchor="ctr"/>
           <a:lstStyle/>
           <a:p>
-            <a:pPr algn="ctr" indent="0" marL="0">
+            <a:pPr eaLnBrk="0" algn="ctr" indent="0" marL="0">
               <a:buNone/>
             </a:pPr>
             <a:r>
@@ -6915,7 +6915,7 @@
           <a:bodyPr wrap="square" lIns="0" tIns="0" rIns="0" bIns="0" rtlCol="0" anchor="t"/>
           <a:lstStyle/>
           <a:p>
-            <a:pPr algn="l" indent="0" marL="0">
+            <a:pPr eaLnBrk="0" algn="l" indent="0" marL="0">
               <a:buNone/>
             </a:pPr>
             <a:r>
@@ -6960,7 +6960,7 @@
           <a:bodyPr wrap="square" lIns="0" tIns="0" rIns="0" bIns="0" rtlCol="0" anchor="ctr"/>
           <a:lstStyle/>
           <a:p>
-            <a:pPr algn="ctr" indent="0" marL="0">
+            <a:pPr eaLnBrk="0" algn="ctr" indent="0" marL="0">
               <a:buNone/>
             </a:pPr>
             <a:r>
@@ -6999,7 +6999,7 @@
           <a:bodyPr wrap="square" lIns="0" tIns="0" rIns="0" bIns="0" rtlCol="0" anchor="t"/>
           <a:lstStyle/>
           <a:p>
-            <a:pPr algn="l" indent="0" marL="0">
+            <a:pPr eaLnBrk="0" algn="l" indent="0" marL="0">
               <a:buNone/>
             </a:pPr>
             <a:r>
@@ -7056,7 +7056,7 @@
             </a:lvl1pPr>
           </a:lstStyle>
           <a:p>
-            <a:pPr algn="r"/>
+            <a:pPr eaLnBrk="0" algn="r"/>
             <a:fld id="{F7021451-1387-4CA6-816F-3879F97B5CBC}" type="slidenum">
               <a:rPr b="0" lang="en-US"/>
               <a:t>7</a:t>
@@ -7113,7 +7113,7 @@
           <a:bodyPr wrap="square" lIns="0" tIns="0" rIns="0" bIns="0" rtlCol="0" anchor="ctr"/>
           <a:lstStyle/>
           <a:p>
-            <a:pPr algn="l" indent="0" marL="0">
+            <a:pPr eaLnBrk="0" algn="l" indent="0" marL="0">
               <a:buNone/>
             </a:pPr>
             <a:r>
@@ -7179,7 +7179,7 @@
           <a:bodyPr wrap="square" lIns="0" tIns="0" rIns="0" bIns="0" rtlCol="0" anchor="ctr"/>
           <a:lstStyle/>
           <a:p>
-            <a:pPr indent="0" marL="0">
+            <a:pPr eaLnBrk="0" indent="0" marL="0">
               <a:spcAft>
                 <a:spcPts val="600"/>
               </a:spcAft>
@@ -7229,7 +7229,7 @@
           <a:bodyPr wrap="square" lIns="177800" tIns="0" rIns="177800" bIns="0" rtlCol="0" anchor="ctr"/>
           <a:lstStyle/>
           <a:p>
-            <a:pPr algn="l" indent="0" marL="0">
+            <a:pPr eaLnBrk="0" algn="l" indent="0" marL="0">
               <a:buNone/>
             </a:pPr>
             <a:r>
@@ -7276,7 +7276,7 @@
           <a:bodyPr wrap="square" lIns="177800" tIns="0" rIns="177800" bIns="0" rtlCol="0" anchor="ctr"/>
           <a:lstStyle/>
           <a:p>
-            <a:pPr algn="l" indent="0" marL="0">
+            <a:pPr eaLnBrk="0" algn="l" indent="0" marL="0">
               <a:buNone/>
             </a:pPr>
             <a:r>
@@ -7315,7 +7315,7 @@
           <a:bodyPr wrap="square" lIns="0" tIns="0" rIns="0" bIns="0" rtlCol="0" anchor="t"/>
           <a:lstStyle/>
           <a:p>
-            <a:pPr algn="l" indent="0" marL="0">
+            <a:pPr eaLnBrk="0" algn="l" indent="0" marL="0">
               <a:buNone/>
             </a:pPr>
             <a:r>
@@ -7354,7 +7354,7 @@
           <a:bodyPr wrap="square" lIns="0" tIns="0" rIns="0" bIns="0" rtlCol="0" anchor="ctr"/>
           <a:lstStyle/>
           <a:p>
-            <a:pPr algn="l" indent="0" marL="0">
+            <a:pPr eaLnBrk="0" algn="l" indent="0" marL="0">
               <a:buNone/>
             </a:pPr>
             <a:r>
@@ -7393,7 +7393,7 @@
           <a:bodyPr wrap="square" lIns="0" tIns="0" rIns="0" bIns="0" rtlCol="0" anchor="ctr"/>
           <a:lstStyle/>
           <a:p>
-            <a:pPr algn="l" indent="0" marL="0">
+            <a:pPr eaLnBrk="0" algn="l" indent="0" marL="0">
               <a:buNone/>
             </a:pPr>
             <a:r>
@@ -7432,7 +7432,7 @@
           <a:bodyPr wrap="square" lIns="0" tIns="0" rIns="0" bIns="0" rtlCol="0" anchor="ctr"/>
           <a:lstStyle/>
           <a:p>
-            <a:pPr algn="l" indent="0" marL="0">
+            <a:pPr eaLnBrk="0" algn="l" indent="0" marL="0">
               <a:buNone/>
             </a:pPr>
             <a:r>
@@ -7489,7 +7489,7 @@
             </a:lvl1pPr>
           </a:lstStyle>
           <a:p>
-            <a:pPr algn="r"/>
+            <a:pPr eaLnBrk="0" algn="r"/>
             <a:fld id="{F7021451-1387-4CA6-816F-3879F97B5CBC}" type="slidenum">
               <a:rPr b="0" lang="en-US"/>
               <a:t>8</a:t>

--- a/dist/초3/음악·미술/음악표현/초3_음악·미술_음악표현_01_박과리듬.pptx
+++ b/dist/초3/음악·미술/음악표현/초3_음악·미술_음악표현_01_박과리듬.pptx
@@ -114,30 +114,30 @@
   <p:extLst>
     <p:ext uri="{521415D9-36F7-43E2-AB2F-B90AF26B5E84}">
       <p14:sectionLst xmlns:p14="http://schemas.microsoft.com/office/powerpoint/2010/main">
-        <p14:section name="도입" id="{2b827055-ae2d-e830-3afd-343d706d7acd}">
+        <p14:section name="도입" id="{345d7c08-b18c-3697-7030-e987ab778c23}">
           <p14:sldIdLst>
             <p14:sldId id="256"/>
           </p14:sldIdLst>
         </p14:section>
-        <p14:section name="개념" id="{bb193c9f-e6a9-5e0e-9efa-96e7893255f0}">
+        <p14:section name="개념" id="{b4fac5ca-382f-4d2e-2ad8-e1e7d62b0c50}">
           <p14:sldIdLst>
             <p14:sldId id="257"/>
             <p14:sldId id="258"/>
             <p14:sldId id="259"/>
           </p14:sldIdLst>
         </p14:section>
-        <p14:section name="연습" id="{dfb2c9a5-6a1e-3a32-90f2-125c049ae7ab}">
+        <p14:section name="연습" id="{7bfd443c-1b25-cffb-b379-81921594f758}">
           <p14:sldIdLst>
             <p14:sldId id="260"/>
             <p14:sldId id="261"/>
           </p14:sldIdLst>
         </p14:section>
-        <p14:section name="확인" id="{06590ff9-898e-e518-a013-9159cc1baf5d}">
+        <p14:section name="확인" id="{f9387828-1421-1743-96cc-d44d79a5e1cb}">
           <p14:sldIdLst>
             <p14:sldId id="262"/>
           </p14:sldIdLst>
         </p14:section>
-        <p14:section name="정리" id="{82e9b50d-97c9-1914-f0b8-39d98b668b97}">
+        <p14:section name="정리" id="{dba6c3f3-a86c-693b-11ac-762b282ba21b}">
           <p14:sldIdLst>
             <p14:sldId id="263"/>
           </p14:sldIdLst>
@@ -2391,7 +2391,7 @@
           </p:nvPr>
         </p:nvGraphicFramePr>
         <p:xfrm>
-          <a:off x="7680960" y="1615440"/>
+          <a:off x="7680960" y="1630680"/>
           <a:ext cx="3931920" cy="914400"/>
         </p:xfrm>
         <a:graphic>
@@ -2404,7 +2404,7 @@
                 <a:gridCol w="982980"/>
                 <a:gridCol w="982980"/>
               </a:tblGrid>
-              <a:tr h="487680">
+              <a:tr h="472440">
                 <a:tc>
                   <a:txBody>
                     <a:bodyPr/>
@@ -2678,7 +2678,7 @@
                   </a:tcPr>
                 </a:tc>
               </a:tr>
-              <a:tr h="487680">
+              <a:tr h="472440">
                 <a:tc>
                   <a:txBody>
                     <a:bodyPr/>
@@ -4129,7 +4129,7 @@
           </p:nvPr>
         </p:nvGraphicFramePr>
         <p:xfrm>
-          <a:off x="2802636" y="3078480"/>
+          <a:off x="2802636" y="3093720"/>
           <a:ext cx="6583680" cy="914400"/>
         </p:xfrm>
         <a:graphic>
@@ -4142,7 +4142,7 @@
                 <a:gridCol w="1645920"/>
                 <a:gridCol w="1645920"/>
               </a:tblGrid>
-              <a:tr h="487680">
+              <a:tr h="472440">
                 <a:tc>
                   <a:txBody>
                     <a:bodyPr/>
@@ -4416,7 +4416,7 @@
                   </a:tcPr>
                 </a:tc>
               </a:tr>
-              <a:tr h="487680">
+              <a:tr h="472440">
                 <a:tc>
                   <a:txBody>
                     <a:bodyPr/>
@@ -4978,20 +4978,20 @@
           </p:nvPr>
         </p:nvGraphicFramePr>
         <p:xfrm>
-          <a:off x="1344168" y="2225040"/>
-          <a:ext cx="4206240" cy="914400"/>
+          <a:off x="1344168" y="2232660"/>
+          <a:ext cx="5486400" cy="914400"/>
         </p:xfrm>
         <a:graphic>
           <a:graphicData uri="http://schemas.openxmlformats.org/drawingml/2006/table">
             <a:tbl>
               <a:tblPr/>
               <a:tblGrid>
-                <a:gridCol w="1051560"/>
-                <a:gridCol w="1051560"/>
-                <a:gridCol w="1051560"/>
-                <a:gridCol w="1051560"/>
+                <a:gridCol w="1371600"/>
+                <a:gridCol w="1371600"/>
+                <a:gridCol w="1371600"/>
+                <a:gridCol w="1371600"/>
               </a:tblGrid>
-              <a:tr h="487680">
+              <a:tr h="472440">
                 <a:tc>
                   <a:txBody>
                     <a:bodyPr/>
@@ -5331,20 +5331,20 @@
           </p:nvPr>
         </p:nvGraphicFramePr>
         <p:xfrm>
-          <a:off x="1344168" y="3322320"/>
-          <a:ext cx="4206240" cy="914400"/>
+          <a:off x="1344168" y="3329940"/>
+          <a:ext cx="5486400" cy="914400"/>
         </p:xfrm>
         <a:graphic>
           <a:graphicData uri="http://schemas.openxmlformats.org/drawingml/2006/table">
             <a:tbl>
               <a:tblPr/>
               <a:tblGrid>
-                <a:gridCol w="1051560"/>
-                <a:gridCol w="1051560"/>
-                <a:gridCol w="1051560"/>
-                <a:gridCol w="1051560"/>
+                <a:gridCol w="1371600"/>
+                <a:gridCol w="1371600"/>
+                <a:gridCol w="1371600"/>
+                <a:gridCol w="1371600"/>
               </a:tblGrid>
-              <a:tr h="487680">
+              <a:tr h="472440">
                 <a:tc>
                   <a:txBody>
                     <a:bodyPr/>
@@ -5684,20 +5684,20 @@
           </p:nvPr>
         </p:nvGraphicFramePr>
         <p:xfrm>
-          <a:off x="1344168" y="4419600"/>
-          <a:ext cx="4206240" cy="914400"/>
+          <a:off x="1344168" y="4427220"/>
+          <a:ext cx="5486400" cy="914400"/>
         </p:xfrm>
         <a:graphic>
           <a:graphicData uri="http://schemas.openxmlformats.org/drawingml/2006/table">
             <a:tbl>
               <a:tblPr/>
               <a:tblGrid>
-                <a:gridCol w="1051560"/>
-                <a:gridCol w="1051560"/>
-                <a:gridCol w="1051560"/>
-                <a:gridCol w="1051560"/>
+                <a:gridCol w="1371600"/>
+                <a:gridCol w="1371600"/>
+                <a:gridCol w="1371600"/>
+                <a:gridCol w="1371600"/>
               </a:tblGrid>
-              <a:tr h="487680">
+              <a:tr h="472440">
                 <a:tc>
                   <a:txBody>
                     <a:bodyPr/>
